--- a/04_SpringBoot_Security.pptx
+++ b/04_SpringBoot_Security.pptx
@@ -4796,7 +4796,15 @@
             <a:pPr lvl="1" indent="-342900"/>
             <a:r>
               <a:rPr lang="en-IN" sz="2000" dirty="0"/>
-              <a:t>A builder that can be used configure HTTP security.</a:t>
+              <a:t>Uses builder pattern  to </a:t>
+            </a:r>
+            <a:r>
+              <a:rPr lang="en-IN" sz="2000" dirty="0" err="1"/>
+              <a:t>onfigure</a:t>
+            </a:r>
+            <a:r>
+              <a:rPr lang="en-IN" sz="2000" dirty="0"/>
+              <a:t> HTTP security.</a:t>
             </a:r>
           </a:p>
           <a:p>
@@ -4827,7 +4835,7 @@
             </a:r>
             <a:r>
               <a:rPr lang="en-IN" sz="2000" b="1" dirty="0"/>
-              <a:t>("/public/</a:t>
+              <a:t>("/public/**</a:t>
             </a:r>
             <a:r>
               <a:rPr lang="en-IN" sz="2000" dirty="0"/>
@@ -4839,7 +4847,7 @@
             </a:r>
             <a:r>
               <a:rPr lang="en-IN" sz="2000" dirty="0"/>
-              <a:t>()`**: </a:t>
+              <a:t>() </a:t>
             </a:r>
           </a:p>
           <a:p>
@@ -5182,90 +5190,6 @@
             <a:br>
               <a:rPr lang="en-IN" sz="1800" dirty="0"/>
             </a:br>
-            <a:r>
-              <a:rPr lang="en-IN" sz="1800" dirty="0"/>
-              <a:t>@Bean</a:t>
-            </a:r>
-          </a:p>
-          <a:p>
-            <a:pPr marL="457200" lvl="1" indent="0">
-              <a:buNone/>
-            </a:pPr>
-            <a:r>
-              <a:rPr lang="en-IN" sz="1800" dirty="0" err="1"/>
-              <a:t>AuthenticationManager</a:t>
-            </a:r>
-            <a:r>
-              <a:rPr lang="en-IN" sz="1800" dirty="0"/>
-              <a:t> </a:t>
-            </a:r>
-            <a:r>
-              <a:rPr lang="en-IN" sz="1800" dirty="0" err="1"/>
-              <a:t>authenticationManager</a:t>
-            </a:r>
-            <a:r>
-              <a:rPr lang="en-IN" sz="1800" dirty="0"/>
-              <a:t>(</a:t>
-            </a:r>
-            <a:r>
-              <a:rPr lang="en-IN" sz="1800" dirty="0" err="1"/>
-              <a:t>AuthenticationConfiguration</a:t>
-            </a:r>
-            <a:r>
-              <a:rPr lang="en-IN" sz="1800" dirty="0"/>
-              <a:t> </a:t>
-            </a:r>
-            <a:r>
-              <a:rPr lang="en-IN" sz="1800" dirty="0" err="1"/>
-              <a:t>authenticationConfiguration</a:t>
-            </a:r>
-            <a:r>
-              <a:rPr lang="en-IN" sz="1800" dirty="0"/>
-              <a:t>) </a:t>
-            </a:r>
-            <a:r>
-              <a:rPr lang="en-IN" sz="1800" b="1" dirty="0"/>
-              <a:t>throws</a:t>
-            </a:r>
-            <a:r>
-              <a:rPr lang="en-IN" sz="1800" dirty="0"/>
-              <a:t> Exception {</a:t>
-            </a:r>
-          </a:p>
-          <a:p>
-            <a:pPr marL="457200" lvl="1" indent="0">
-              <a:buNone/>
-            </a:pPr>
-            <a:r>
-              <a:rPr lang="en-IN" sz="1800" b="1" dirty="0"/>
-              <a:t>       return</a:t>
-            </a:r>
-            <a:r>
-              <a:rPr lang="en-IN" sz="1800" dirty="0"/>
-              <a:t> </a:t>
-            </a:r>
-            <a:r>
-              <a:rPr lang="en-IN" sz="1800" dirty="0" err="1"/>
-              <a:t>authenticationConfiguration.getAuthenticationManager</a:t>
-            </a:r>
-            <a:r>
-              <a:rPr lang="en-IN" sz="1800" dirty="0"/>
-              <a:t>();</a:t>
-            </a:r>
-          </a:p>
-          <a:p>
-            <a:pPr marL="457200" lvl="1" indent="0">
-              <a:buNone/>
-            </a:pPr>
-            <a:r>
-              <a:rPr lang="en-IN" sz="1800" dirty="0"/>
-              <a:t>}</a:t>
-            </a:r>
-          </a:p>
-          <a:p>
-            <a:pPr marL="457200" lvl="1" indent="0">
-              <a:buNone/>
-            </a:pPr>
             <a:endParaRPr lang="en-IN" sz="1800" dirty="0"/>
           </a:p>
           <a:p>
